--- a/生成的课件/04_管理经济学_第04章_生产决策分析.pptx
+++ b/生成的课件/04_管理经济学_第04章_生产决策分析.pptx
@@ -4047,7 +4047,7 @@
                 <a:latin typeface="Times New Roman"/>
                 <a:ea typeface="宋体"/>
               </a:rPr>
-              <a:t>  1. 等产量曲线（Isoquant Curve）及其性质</a:t>
+              <a:t>1. 等产量曲线（Isoquant Curve）及其性质</a:t>
             </a:r>
           </a:p>
         </p:txBody>
@@ -4090,7 +4090,7 @@
                 <a:latin typeface="Times New Roman"/>
                 <a:ea typeface="宋体"/>
               </a:rPr>
-              <a:t>（1）等产量线定义： </a:t>
+              <a:t>（1）等产量线定义：</a:t>
             </a:r>
             <a:r>
               <a:rPr sz="1250" b="0">
@@ -4120,7 +4120,7 @@
                 <a:latin typeface="Times New Roman"/>
                 <a:ea typeface="宋体"/>
               </a:rPr>
-              <a:t>（2）四大基本特征： </a:t>
+              <a:t>（2）四大基本特征：</a:t>
             </a:r>
             <a:r>
               <a:rPr sz="1250" b="0">
@@ -4150,7 +4150,7 @@
                 <a:latin typeface="Times New Roman"/>
                 <a:ea typeface="宋体"/>
               </a:rPr>
-              <a:t>（3）边际技术替代率（MRTS）： </a:t>
+              <a:t>（3）边际技术替代率（MRTS）：</a:t>
             </a:r>
             <a:r>
               <a:rPr sz="1250" b="0">
@@ -4160,7 +4160,7 @@
                 <a:latin typeface="Times New Roman"/>
                 <a:ea typeface="宋体"/>
               </a:rPr>
-              <a:t>MRTS_{LK} = -\frac{\Delta K}{\Delta L} = \frac{MP_L}{MP_K}（维持产量不变时，增加 1 单位劳动所能替代的资本数量）。</a:t>
+              <a:t>MRTS_LK = -(Δ K) / (Δ L) = MP_L / MP_K（维持产量不变时，增加 1 单位劳动所能替代的资本数量）。</a:t>
             </a:r>
           </a:p>
           <a:p>
@@ -4180,7 +4180,7 @@
                 <a:latin typeface="Times New Roman"/>
                 <a:ea typeface="宋体"/>
               </a:rPr>
-              <a:t>（4）MRTS 递减规律： </a:t>
+              <a:t>（4）MRTS 递减规律：</a:t>
             </a:r>
             <a:r>
               <a:rPr sz="1250" b="0">
@@ -4290,7 +4290,7 @@
                 <a:latin typeface="Times New Roman"/>
                 <a:ea typeface="宋体"/>
               </a:rPr>
-              <a:t>  2. 等成本曲线（Isocost Line）与斜率</a:t>
+              <a:t>2. 等成本曲线（Isocost Line）与斜率</a:t>
             </a:r>
           </a:p>
         </p:txBody>
@@ -4333,7 +4333,7 @@
                 <a:latin typeface="Times New Roman"/>
                 <a:ea typeface="宋体"/>
               </a:rPr>
-              <a:t>（1）等成本方程： </a:t>
+              <a:t>（1）等成本方程：</a:t>
             </a:r>
             <a:r>
               <a:rPr sz="1250" b="0">
@@ -4343,7 +4343,7 @@
                 <a:latin typeface="Times New Roman"/>
                 <a:ea typeface="宋体"/>
               </a:rPr>
-              <a:t>C = wL + rK \implies K = \frac{C}{r} - \frac{w}{r} L \quad (w: 工资, r: 资本租金)</a:t>
+              <a:t>C = wL + rK ⇒ K = C / r - w / r·L (w: 工资, r: 资本租金)</a:t>
             </a:r>
           </a:p>
           <a:p>
@@ -4363,7 +4363,7 @@
                 <a:latin typeface="Times New Roman"/>
                 <a:ea typeface="宋体"/>
               </a:rPr>
-              <a:t>（2）几何截距与斜率： </a:t>
+              <a:t>（2）几何截距与斜率：</a:t>
             </a:r>
             <a:r>
               <a:rPr sz="1250" b="0">
@@ -4393,7 +4393,7 @@
                 <a:latin typeface="Times New Roman"/>
                 <a:ea typeface="宋体"/>
               </a:rPr>
-              <a:t>（3）平移与转动： </a:t>
+              <a:t>（3）平移与转动：</a:t>
             </a:r>
             <a:r>
               <a:rPr sz="1250" b="0">
@@ -4460,7 +4460,7 @@
                 <a:latin typeface="Times New Roman"/>
                 <a:ea typeface="宋体"/>
               </a:rPr>
-              <a:t>  ★ 核心要点：等产量曲线体现生产技术约束，等成本曲线体现企业财务预算约束，二者结合决定最优要素配比。</a:t>
+              <a:t>★ 核心要点：等产量曲线体现生产技术约束，等成本曲线体现企业财务预算约束，二者结合决定最优要素配比。</a:t>
             </a:r>
           </a:p>
         </p:txBody>
@@ -4867,7 +4867,7 @@
                 <a:latin typeface="Times New Roman"/>
                 <a:ea typeface="宋体"/>
               </a:rPr>
-              <a:t>  1. 成本最低要素组合切点定理</a:t>
+              <a:t>1. 成本最低要素组合切点定理</a:t>
             </a:r>
           </a:p>
         </p:txBody>
@@ -4910,7 +4910,7 @@
                 <a:latin typeface="Times New Roman"/>
                 <a:ea typeface="宋体"/>
               </a:rPr>
-              <a:t>（1）切点几何条件： </a:t>
+              <a:t>（1）切点几何条件：</a:t>
             </a:r>
             <a:r>
               <a:rPr sz="1250" b="0">
@@ -4920,7 +4920,7 @@
                 <a:latin typeface="Times New Roman"/>
                 <a:ea typeface="宋体"/>
               </a:rPr>
-              <a:t>既定产量下等产量曲线与最低等成本线相切于点 E^*，切点处两条线的斜率相等：</a:t>
+              <a:t>既定产量下等产量曲线与最低等成本线相切于点 E*，切点处两条线的斜率相等：</a:t>
             </a:r>
           </a:p>
           <a:p>
@@ -4940,7 +4940,7 @@
                 <a:latin typeface="Times New Roman"/>
                 <a:ea typeface="宋体"/>
               </a:rPr>
-              <a:t>（2）黄金等边际法则： </a:t>
+              <a:t>（2）黄金等边际法则：</a:t>
             </a:r>
             <a:r>
               <a:rPr sz="1250" b="0">
@@ -4950,7 +4950,7 @@
                 <a:latin typeface="Times New Roman"/>
                 <a:ea typeface="宋体"/>
               </a:rPr>
-              <a:t>MRTS_{LK} = \frac{w}{r} \iff \frac{MP_L}{MP_K} = \frac{w}{r} \iff \frac{MP_L}{w} = \frac{MP_K}{r} = \lambda</a:t>
+              <a:t>MRTS_LK = w / r ⇔ MP_L / MP_K = w / r ⇔ MP_L / w = MP_K / r = λ</a:t>
             </a:r>
           </a:p>
           <a:p>
@@ -4970,7 +4970,7 @@
                 <a:latin typeface="Times New Roman"/>
                 <a:ea typeface="宋体"/>
               </a:rPr>
-              <a:t>（3）经济学真谛： </a:t>
+              <a:t>（3）经济学真谛：</a:t>
             </a:r>
             <a:r>
               <a:rPr sz="1250" b="0">
@@ -5000,7 +5000,7 @@
                 <a:latin typeface="Times New Roman"/>
                 <a:ea typeface="宋体"/>
               </a:rPr>
-              <a:t>（4）案例4-2 启示： </a:t>
+              <a:t>（4）案例4-2 启示：</a:t>
             </a:r>
             <a:r>
               <a:rPr sz="1250" b="0">
@@ -5110,7 +5110,7 @@
                 <a:latin typeface="Times New Roman"/>
                 <a:ea typeface="宋体"/>
               </a:rPr>
-              <a:t>  2. 例4-3 至 例4-5 实战推导</a:t>
+              <a:t>2. 例4-3 至 例4-5 实战推导</a:t>
             </a:r>
           </a:p>
         </p:txBody>
@@ -5153,7 +5153,7 @@
                 <a:latin typeface="Times New Roman"/>
                 <a:ea typeface="宋体"/>
               </a:rPr>
-              <a:t>（1）例4-3 算例： </a:t>
+              <a:t>（1）例4-3 算例：</a:t>
             </a:r>
             <a:r>
               <a:rPr sz="1250" b="0">
@@ -5183,7 +5183,7 @@
                 <a:latin typeface="Times New Roman"/>
                 <a:ea typeface="宋体"/>
               </a:rPr>
-              <a:t>（2）联立求解： </a:t>
+              <a:t>（2）联立求解：</a:t>
             </a:r>
             <a:r>
               <a:rPr sz="1250" b="0">
@@ -5193,7 +5193,7 @@
                 <a:latin typeface="Times New Roman"/>
                 <a:ea typeface="宋体"/>
               </a:rPr>
-              <a:t>MP_L = 5K, MP_K = 5L \implies \frac{5K}{5L} = \frac{20}{50} \implies K = 0.4L。代入产量方程：5L(0.4L) = 1000 \implies 2L^2 = 1000 \implies L^* = 22.36, K^* = 8.94。</a:t>
+              <a:t>MP_L = 5K, MP_K = 5L ⇒ 5K / 5L = 20 / 50 ⇒ K = 0.4L。代入产量方程：5L(0.4L) = 1000 ⇒ 2L² = 1000 ⇒ L* = 22.36, K* = 8.94。</a:t>
             </a:r>
           </a:p>
           <a:p>
@@ -5213,7 +5213,7 @@
                 <a:latin typeface="Times New Roman"/>
                 <a:ea typeface="宋体"/>
               </a:rPr>
-              <a:t>（3）最小总成本： </a:t>
+              <a:t>（3）最小总成本：</a:t>
             </a:r>
             <a:r>
               <a:rPr sz="1250" b="0">
@@ -5223,7 +5223,7 @@
                 <a:latin typeface="Times New Roman"/>
                 <a:ea typeface="宋体"/>
               </a:rPr>
-              <a:t>C_{min} = 20 \times 22.36 + 50 \times 8.94 = 894.4 元。</a:t>
+              <a:t>C_min = 20 × 22.36 + 50 × 8.94 = 894.4 元。</a:t>
             </a:r>
           </a:p>
         </p:txBody>
@@ -5280,7 +5280,7 @@
                 <a:latin typeface="Times New Roman"/>
                 <a:ea typeface="宋体"/>
               </a:rPr>
-              <a:t>  ★ 核心要点：等边际法则是指导企业采购与配置多要素投入的核心通用算法。</a:t>
+              <a:t>★ 核心要点：等边际法则是指导企业采购与配置多要素投入的核心通用算法。</a:t>
             </a:r>
           </a:p>
         </p:txBody>
@@ -5994,7 +5994,7 @@
                 <a:latin typeface="Times New Roman"/>
                 <a:ea typeface="宋体"/>
               </a:rPr>
-              <a:t>  1. 规模收益的概念与三种基本类型</a:t>
+              <a:t>1. 规模收益的概念与三种基本类型</a:t>
             </a:r>
           </a:p>
         </p:txBody>
@@ -6037,7 +6037,7 @@
                 <a:latin typeface="Times New Roman"/>
                 <a:ea typeface="宋体"/>
               </a:rPr>
-              <a:t>（1）规模收益定义： </a:t>
+              <a:t>（1）规模收益定义：</a:t>
             </a:r>
             <a:r>
               <a:rPr sz="1250" b="0">
@@ -6067,7 +6067,7 @@
                 <a:latin typeface="Times New Roman"/>
                 <a:ea typeface="宋体"/>
               </a:rPr>
-              <a:t>（2）规模收益递增（IRS, h &gt; k）： </a:t>
+              <a:t>（2）规模收益递增（IRS, h &gt; k）：</a:t>
             </a:r>
             <a:r>
               <a:rPr sz="1250" b="0">
@@ -6097,7 +6097,7 @@
                 <a:latin typeface="Times New Roman"/>
                 <a:ea typeface="宋体"/>
               </a:rPr>
-              <a:t>（3）规模收益不变（CRS, h = k）： </a:t>
+              <a:t>（3）规模收益不变（CRS, h = k）：</a:t>
             </a:r>
             <a:r>
               <a:rPr sz="1250" b="0">
@@ -6127,7 +6127,7 @@
                 <a:latin typeface="Times New Roman"/>
                 <a:ea typeface="宋体"/>
               </a:rPr>
-              <a:t>（4）规模收益递减（DRS, h &lt; k）： </a:t>
+              <a:t>（4）规模收益递减（DRS, h &lt; k）：</a:t>
             </a:r>
             <a:r>
               <a:rPr sz="1250" b="0">
@@ -6237,7 +6237,7 @@
                 <a:latin typeface="Times New Roman"/>
                 <a:ea typeface="宋体"/>
               </a:rPr>
-              <a:t>  2. 企业规模演进的三阶段规律</a:t>
+              <a:t>2. 企业规模演进的三阶段规律</a:t>
             </a:r>
           </a:p>
         </p:txBody>
@@ -6280,7 +6280,7 @@
                 <a:latin typeface="Times New Roman"/>
                 <a:ea typeface="宋体"/>
               </a:rPr>
-              <a:t>（1）阶段一（小规模扩产）： </a:t>
+              <a:t>（1）阶段一（小规模扩产）：</a:t>
             </a:r>
             <a:r>
               <a:rPr sz="1250" b="0">
@@ -6310,7 +6310,7 @@
                 <a:latin typeface="Times New Roman"/>
                 <a:ea typeface="宋体"/>
               </a:rPr>
-              <a:t>（2）阶段二（中等适度规模）： </a:t>
+              <a:t>（2）阶段二（中等适度规模）：</a:t>
             </a:r>
             <a:r>
               <a:rPr sz="1250" b="0">
@@ -6340,7 +6340,7 @@
                 <a:latin typeface="Times New Roman"/>
                 <a:ea typeface="宋体"/>
               </a:rPr>
-              <a:t>（3）阶段三（超大规模过度扩张）： </a:t>
+              <a:t>（3）阶段三（超大规模过度扩张）：</a:t>
             </a:r>
             <a:r>
               <a:rPr sz="1250" b="0">
@@ -6407,7 +6407,7 @@
                 <a:latin typeface="Times New Roman"/>
                 <a:ea typeface="宋体"/>
               </a:rPr>
-              <a:t>  ★ 核心要点：企业战略的目标是精准识别并把握规模收益递增黄金期，将企业锁定在规模收益不变的最低有效规模（MES）。</a:t>
+              <a:t>★ 核心要点：企业战略的目标是精准识别并把握规模收益递增黄金期，将企业锁定在规模收益不变的最低有效规模（MES）。</a:t>
             </a:r>
           </a:p>
         </p:txBody>
@@ -6814,7 +6814,7 @@
                 <a:latin typeface="Times New Roman"/>
                 <a:ea typeface="宋体"/>
               </a:rPr>
-              <a:t>  1. 技术装备几何尺度效应</a:t>
+              <a:t>1. 技术装备几何尺度效应</a:t>
             </a:r>
           </a:p>
         </p:txBody>
@@ -6857,7 +6857,7 @@
                 <a:latin typeface="Times New Roman"/>
                 <a:ea typeface="宋体"/>
               </a:rPr>
-              <a:t>（1）技术装备因素： </a:t>
+              <a:t>（1）技术装备因素：</a:t>
             </a:r>
             <a:r>
               <a:rPr sz="1200" b="0">
@@ -6887,7 +6887,7 @@
                 <a:latin typeface="Times New Roman"/>
                 <a:ea typeface="宋体"/>
               </a:rPr>
-              <a:t>• 几何尺度定律： </a:t>
+              <a:t>• 几何尺度定律：</a:t>
             </a:r>
             <a:r>
               <a:rPr sz="1200" b="0">
@@ -6997,7 +6997,7 @@
                 <a:latin typeface="Times New Roman"/>
                 <a:ea typeface="宋体"/>
               </a:rPr>
-              <a:t>  2. 深度专业化分工</a:t>
+              <a:t>2. 深度专业化分工</a:t>
             </a:r>
           </a:p>
         </p:txBody>
@@ -7040,7 +7040,7 @@
                 <a:latin typeface="Times New Roman"/>
                 <a:ea typeface="宋体"/>
               </a:rPr>
-              <a:t>（2）专业化分工： </a:t>
+              <a:t>（2）专业化分工：</a:t>
             </a:r>
             <a:r>
               <a:rPr sz="1200" b="0">
@@ -7070,7 +7070,7 @@
                 <a:latin typeface="Times New Roman"/>
                 <a:ea typeface="宋体"/>
               </a:rPr>
-              <a:t>• 熟练度与生产率： </a:t>
+              <a:t>• 熟练度与生产率：</a:t>
             </a:r>
             <a:r>
               <a:rPr sz="1200" b="0">
@@ -7180,7 +7180,7 @@
                 <a:latin typeface="Times New Roman"/>
                 <a:ea typeface="宋体"/>
               </a:rPr>
-              <a:t>  3. 专用高精设备与自动化</a:t>
+              <a:t>3. 专用高精设备与自动化</a:t>
             </a:r>
           </a:p>
         </p:txBody>
@@ -7223,7 +7223,7 @@
                 <a:latin typeface="Times New Roman"/>
                 <a:ea typeface="宋体"/>
               </a:rPr>
-              <a:t>（3）专用设备与先进技术： </a:t>
+              <a:t>（3）专用设备与先进技术：</a:t>
             </a:r>
             <a:r>
               <a:rPr sz="1200" b="0">
@@ -7253,7 +7253,7 @@
                 <a:latin typeface="Times New Roman"/>
                 <a:ea typeface="宋体"/>
               </a:rPr>
-              <a:t>• 降本提质增效： </a:t>
+              <a:t>• 降本提质增效：</a:t>
             </a:r>
             <a:r>
               <a:rPr sz="1200" b="0">
@@ -7320,7 +7320,7 @@
                 <a:latin typeface="Times New Roman"/>
                 <a:ea typeface="宋体"/>
               </a:rPr>
-              <a:t>  ★ 核心要点：生产与技术层面的不可分割性与几何尺度经济，是制造业规模报酬递增的第一大硬核支柱。</a:t>
+              <a:t>★ 核心要点：生产与技术层面的不可分割性与几何尺度经济，是制造业规模报酬递增的第一大硬核支柱。</a:t>
             </a:r>
           </a:p>
         </p:txBody>
@@ -7727,7 +7727,7 @@
                 <a:latin typeface="Times New Roman"/>
                 <a:ea typeface="宋体"/>
               </a:rPr>
-              <a:t>  4. 存货与备件经济性</a:t>
+              <a:t>4. 存货与备件经济性</a:t>
             </a:r>
           </a:p>
         </p:txBody>
@@ -7770,7 +7770,7 @@
                 <a:latin typeface="Times New Roman"/>
                 <a:ea typeface="宋体"/>
               </a:rPr>
-              <a:t>（4）存货经济性： </a:t>
+              <a:t>（4）存货经济性：</a:t>
             </a:r>
             <a:r>
               <a:rPr sz="1200" b="0">
@@ -7800,7 +7800,7 @@
                 <a:latin typeface="Times New Roman"/>
                 <a:ea typeface="宋体"/>
               </a:rPr>
-              <a:t>• 课本经典概率模型： </a:t>
+              <a:t>• 课本经典概率模型：</a:t>
             </a:r>
             <a:r>
               <a:rPr sz="1200" b="0">
@@ -7910,7 +7910,7 @@
                 <a:latin typeface="Times New Roman"/>
                 <a:ea typeface="宋体"/>
               </a:rPr>
-              <a:t>  5. 大规模集中采购议价</a:t>
+              <a:t>5. 大规模集中采购议价</a:t>
             </a:r>
           </a:p>
         </p:txBody>
@@ -7953,7 +7953,7 @@
                 <a:latin typeface="Times New Roman"/>
                 <a:ea typeface="宋体"/>
               </a:rPr>
-              <a:t>（5）大规模采购经济性： </a:t>
+              <a:t>（5）大规模采购经济性：</a:t>
             </a:r>
             <a:r>
               <a:rPr sz="1200" b="0">
@@ -8063,7 +8063,7 @@
                 <a:latin typeface="Times New Roman"/>
                 <a:ea typeface="宋体"/>
               </a:rPr>
-              <a:t>  6. 大规模雇佣与招聘摊薄</a:t>
+              <a:t>6. 大规模雇佣与招聘摊薄</a:t>
             </a:r>
           </a:p>
         </p:txBody>
@@ -8106,7 +8106,7 @@
                 <a:latin typeface="Times New Roman"/>
                 <a:ea typeface="宋体"/>
               </a:rPr>
-              <a:t>（6）大规模雇用经济性： </a:t>
+              <a:t>（6）大规模雇用经济性：</a:t>
             </a:r>
             <a:r>
               <a:rPr sz="1200" b="0">
@@ -8136,7 +8136,7 @@
                 <a:latin typeface="Times New Roman"/>
                 <a:ea typeface="宋体"/>
               </a:rPr>
-              <a:t>• 课本经典招聘案例： </a:t>
+              <a:t>• 课本经典招聘案例：</a:t>
             </a:r>
             <a:r>
               <a:rPr sz="1200" b="0">
@@ -8203,7 +8203,7 @@
                 <a:latin typeface="Times New Roman"/>
                 <a:ea typeface="宋体"/>
               </a:rPr>
-              <a:t>  ★ 核心要点：供应链集中采购与人力资源集中运营的大数法则，赋予了大企业无可比拟的交易费用与成本优势。</a:t>
+              <a:t>★ 核心要点：供应链集中采购与人力资源集中运营的大数法则，赋予了大企业无可比拟的交易费用与成本优势。</a:t>
             </a:r>
           </a:p>
         </p:txBody>
@@ -8610,7 +8610,7 @@
                 <a:latin typeface="Times New Roman"/>
                 <a:ea typeface="宋体"/>
               </a:rPr>
-              <a:t>  7. 大规模金融信贷特权</a:t>
+              <a:t>7. 大规模金融信贷特权</a:t>
             </a:r>
           </a:p>
         </p:txBody>
@@ -8653,7 +8653,7 @@
                 <a:latin typeface="Times New Roman"/>
                 <a:ea typeface="宋体"/>
               </a:rPr>
-              <a:t>（7）大规模金融经济性： </a:t>
+              <a:t>（7）大规模金融经济性：</a:t>
             </a:r>
             <a:r>
               <a:rPr sz="1200" b="0">
@@ -8763,7 +8763,7 @@
                 <a:latin typeface="Times New Roman"/>
                 <a:ea typeface="宋体"/>
               </a:rPr>
-              <a:t>  8. 巨额广告费的海量摊薄</a:t>
+              <a:t>8. 巨额广告费的海量摊薄</a:t>
             </a:r>
           </a:p>
         </p:txBody>
@@ -8806,7 +8806,7 @@
                 <a:latin typeface="Times New Roman"/>
                 <a:ea typeface="宋体"/>
               </a:rPr>
-              <a:t>（8）大规模广告的利益： </a:t>
+              <a:t>（8）大规模广告的利益：</a:t>
             </a:r>
             <a:r>
               <a:rPr sz="1200" b="0">
@@ -8836,7 +8836,7 @@
                 <a:latin typeface="Times New Roman"/>
                 <a:ea typeface="宋体"/>
               </a:rPr>
-              <a:t>• 课本方便面经典数据： </a:t>
+              <a:t>• 课本方便面经典数据：</a:t>
             </a:r>
             <a:r>
               <a:rPr sz="1200" b="0">
@@ -8946,7 +8946,7 @@
                 <a:latin typeface="Times New Roman"/>
                 <a:ea typeface="宋体"/>
               </a:rPr>
-              <a:t>  9. 强大政府关系与外部影响</a:t>
+              <a:t>9. 强大政府关系与外部影响</a:t>
             </a:r>
           </a:p>
         </p:txBody>
@@ -8989,7 +8989,7 @@
                 <a:latin typeface="Times New Roman"/>
                 <a:ea typeface="宋体"/>
               </a:rPr>
-              <a:t>（9）强大影响力利益： </a:t>
+              <a:t>（9）强大影响力利益：</a:t>
             </a:r>
             <a:r>
               <a:rPr sz="1200" b="0">
@@ -9056,7 +9056,7 @@
                 <a:latin typeface="Times New Roman"/>
                 <a:ea typeface="宋体"/>
               </a:rPr>
-              <a:t>  ★ 核心要点：九大细分因素共同构成了大企业在现代市场经济竞争中碾压中小企业的全方位规模壁垒体系。</a:t>
+              <a:t>★ 核心要点：九大细分因素共同构成了大企业在现代市场经济竞争中碾压中小企业的全方位规模壁垒体系。</a:t>
             </a:r>
           </a:p>
         </p:txBody>
@@ -9463,7 +9463,7 @@
                 <a:latin typeface="Times New Roman"/>
                 <a:ea typeface="宋体"/>
               </a:rPr>
-              <a:t>  1. 促使规模收益不变的内在机理</a:t>
+              <a:t>1. 促使规模收益不变的内在机理</a:t>
             </a:r>
           </a:p>
         </p:txBody>
@@ -9506,7 +9506,7 @@
                 <a:latin typeface="Times New Roman"/>
                 <a:ea typeface="宋体"/>
               </a:rPr>
-              <a:t>（1）分工极致与边际递减： </a:t>
+              <a:t>（1）分工极致与边际递减：</a:t>
             </a:r>
             <a:r>
               <a:rPr sz="1250" b="0">
@@ -9536,7 +9536,7 @@
                 <a:latin typeface="Times New Roman"/>
                 <a:ea typeface="宋体"/>
               </a:rPr>
-              <a:t>（2）设备工程技术上限： </a:t>
+              <a:t>（2）设备工程技术上限：</a:t>
             </a:r>
             <a:r>
               <a:rPr sz="1250" b="0">
@@ -9566,7 +9566,7 @@
                 <a:latin typeface="Times New Roman"/>
                 <a:ea typeface="宋体"/>
               </a:rPr>
-              <a:t>（3）标准厂房复制模式： </a:t>
+              <a:t>（3）标准厂房复制模式：</a:t>
             </a:r>
             <a:r>
               <a:rPr sz="1250" b="0">
@@ -9676,7 +9676,7 @@
                 <a:latin typeface="Times New Roman"/>
                 <a:ea typeface="宋体"/>
               </a:rPr>
-              <a:t>  2. 促使规模收益递减的核心根源——管理官僚化</a:t>
+              <a:t>2. 促使规模收益递减的核心根源——管理官僚化</a:t>
             </a:r>
           </a:p>
         </p:txBody>
@@ -9719,7 +9719,7 @@
                 <a:latin typeface="Times New Roman"/>
                 <a:ea typeface="宋体"/>
               </a:rPr>
-              <a:t>（1）管理幅度与协调难度剧增： </a:t>
+              <a:t>（1）管理幅度与协调难度剧增：</a:t>
             </a:r>
             <a:r>
               <a:rPr sz="1250" b="0">
@@ -9749,7 +9749,7 @@
                 <a:latin typeface="Times New Roman"/>
                 <a:ea typeface="宋体"/>
               </a:rPr>
-              <a:t>（2）官僚主义与文牍主义： </a:t>
+              <a:t>（2）官僚主义与文牍主义：</a:t>
             </a:r>
             <a:r>
               <a:rPr sz="1250" b="0">
@@ -9779,7 +9779,7 @@
                 <a:latin typeface="Times New Roman"/>
                 <a:ea typeface="宋体"/>
               </a:rPr>
-              <a:t>（3）X-非效率（X-Inefficiency）： </a:t>
+              <a:t>（3）X-非效率（X-Inefficiency）：</a:t>
             </a:r>
             <a:r>
               <a:rPr sz="1250" b="0">
@@ -9846,7 +9846,7 @@
                 <a:latin typeface="Times New Roman"/>
                 <a:ea typeface="宋体"/>
               </a:rPr>
-              <a:t>  ★ 核心要点：规模绝非越大越好，克服大企业病与管理官僚主义是跨国巨头突破规模报酬递减诅咒的关键考验。</a:t>
+              <a:t>★ 核心要点：规模绝非越大越好，克服大企业病与管理官僚主义是跨国巨头突破规模报酬递减诅咒的关键考验。</a:t>
             </a:r>
           </a:p>
         </p:txBody>
@@ -10253,7 +10253,7 @@
                 <a:latin typeface="Times New Roman"/>
                 <a:ea typeface="宋体"/>
               </a:rPr>
-              <a:t>  1. 齐次生产函数（Homogeneous Function）判定法</a:t>
+              <a:t>1. 齐次生产函数（Homogeneous Function）判定法</a:t>
             </a:r>
           </a:p>
         </p:txBody>
@@ -10296,7 +10296,7 @@
                 <a:latin typeface="Times New Roman"/>
                 <a:ea typeface="宋体"/>
               </a:rPr>
-              <a:t>（1）齐次定义： </a:t>
+              <a:t>（1）齐次定义：</a:t>
             </a:r>
             <a:r>
               <a:rPr sz="1250" b="0">
@@ -10306,7 +10306,7 @@
                 <a:latin typeface="Times New Roman"/>
                 <a:ea typeface="宋体"/>
               </a:rPr>
-              <a:t>f(kx, ky, kz) = k^n f(x, y, z)，其中 n 为齐次阶数。</a:t>
+              <a:t>f(kx, ky, kz) = kⁿ f(x, y, z)，其中 n 为齐次阶数。</a:t>
             </a:r>
           </a:p>
           <a:p>
@@ -10326,7 +10326,7 @@
                 <a:latin typeface="Times New Roman"/>
                 <a:ea typeface="宋体"/>
               </a:rPr>
-              <a:t>（2）判别准则： </a:t>
+              <a:t>（2）判别准则：</a:t>
             </a:r>
             <a:r>
               <a:rPr sz="1250" b="0">
@@ -10336,7 +10336,7 @@
                 <a:latin typeface="Times New Roman"/>
                 <a:ea typeface="宋体"/>
               </a:rPr>
-              <a:t>① n &gt; 1 \implies 规模收益递增；② n = 1 \implies 规模收益不变；③ n &lt; 1 \implies 规模收益递减。</a:t>
+              <a:t>① n &gt; 1 ⇒ 规模收益递增；② n = 1 ⇒ 规模收益不变；③ n &lt; 1 ⇒ 规模收益递减。</a:t>
             </a:r>
           </a:p>
           <a:p>
@@ -10356,7 +10356,7 @@
                 <a:latin typeface="Times New Roman"/>
                 <a:ea typeface="宋体"/>
               </a:rPr>
-              <a:t>（3）例4-6 算例推导： </a:t>
+              <a:t>（3）例4-6 算例推导：</a:t>
             </a:r>
             <a:r>
               <a:rPr sz="1250" b="0">
@@ -10366,7 +10366,7 @@
                 <a:latin typeface="Times New Roman"/>
                 <a:ea typeface="宋体"/>
               </a:rPr>
-              <a:t>Q = x^{0.4} y^{0.2} z^{0.8} \implies f(kx, ky, kz) = k^{1.4} Q \implies n=1.4 &gt; 1，严格为规模收益递增型！</a:t>
+              <a:t>Q = x^0.4 y^0.2 z^0.8 ⇒ f(kx, ky, kz) = k^1.4 Q ⇒ n=1.4 &gt; 1，严格为规模收益递增型！</a:t>
             </a:r>
           </a:p>
         </p:txBody>
@@ -10466,7 +10466,7 @@
                 <a:latin typeface="Times New Roman"/>
                 <a:ea typeface="宋体"/>
               </a:rPr>
-              <a:t>  2. 案例4-3：马克西-西尔伯斯通（Maxcy-Silberston）汽车曲线</a:t>
+              <a:t>2. 案例4-3：马克西-西尔伯斯通（Maxcy-Silberston）汽车曲线</a:t>
             </a:r>
           </a:p>
         </p:txBody>
@@ -10509,7 +10509,7 @@
                 <a:latin typeface="Times New Roman"/>
                 <a:ea typeface="宋体"/>
               </a:rPr>
-              <a:t>（1）单车型批量与单位成本下降规律： </a:t>
+              <a:t>（1）单车型批量与单位成本下降规律：</a:t>
             </a:r>
             <a:r>
               <a:rPr sz="1250" b="0">
@@ -10539,7 +10539,7 @@
                 <a:latin typeface="Times New Roman"/>
                 <a:ea typeface="宋体"/>
               </a:rPr>
-              <a:t>   • 1000辆 \to 5万辆：单位成本骤降 40%； </a:t>
+              <a:t>• 1000辆 → 5万辆：单位成本骤降 40%；</a:t>
             </a:r>
             <a:r>
               <a:rPr sz="1250" b="0">
@@ -10549,7 +10549,7 @@
                 <a:latin typeface="Times New Roman"/>
                 <a:ea typeface="宋体"/>
               </a:rPr>
-              <a:t>5万 \to 10万辆：单位成本再降 15%；</a:t>
+              <a:t>5万 → 10万辆：单位成本再降 15%；</a:t>
             </a:r>
           </a:p>
           <a:p>
@@ -10569,7 +10569,7 @@
                 <a:latin typeface="Times New Roman"/>
                 <a:ea typeface="宋体"/>
               </a:rPr>
-              <a:t>   • 10万 \to 20万辆：单位成本再降 10%； </a:t>
+              <a:t>• 10万 → 20万辆：单位成本再降 10%；</a:t>
             </a:r>
             <a:r>
               <a:rPr sz="1250" b="0">
@@ -10579,7 +10579,7 @@
                 <a:latin typeface="Times New Roman"/>
                 <a:ea typeface="宋体"/>
               </a:rPr>
-              <a:t>20万 \to 40万辆：降5%；&gt;40万辆下降极缓；&gt;100万辆无规模经济。</a:t>
+              <a:t>20万 → 40万辆：降5%；&gt;40万辆下降极缓；&gt;100万辆无规模经济。</a:t>
             </a:r>
           </a:p>
           <a:p>
@@ -10599,7 +10599,7 @@
                 <a:latin typeface="Times New Roman"/>
                 <a:ea typeface="宋体"/>
               </a:rPr>
-              <a:t>（2）三大工序最小最优规模最小公倍数： </a:t>
+              <a:t>（2）三大工序最小最优规模最小公倍数：</a:t>
             </a:r>
             <a:r>
               <a:rPr sz="1250" b="0">
@@ -10609,7 +10609,7 @@
                 <a:latin typeface="Times New Roman"/>
                 <a:ea typeface="宋体"/>
               </a:rPr>
-              <a:t>组装（6-10万）+ 发动机（50万）+ 冲压（100万）\implies 最优组合为 1套冲压 + 2条发动机线 + 10条组装线 = 100万辆年产能！</a:t>
+              <a:t>组装（6-10万）+ 发动机（50万）+ 冲压（100万） ⇒ 最优组合为 1套冲压 + 2条发动机线 + 10条组装线 = 100万辆年产能！</a:t>
             </a:r>
           </a:p>
         </p:txBody>
@@ -10666,7 +10666,7 @@
                 <a:latin typeface="Times New Roman"/>
                 <a:ea typeface="宋体"/>
               </a:rPr>
-              <a:t>  ★ 核心要点：马克西曲线证明了汽车等重工业存在严格的最小公倍数最优规模，盲目分散设厂将导致严重的巨额成本劣势。</a:t>
+              <a:t>★ 核心要点：马克西曲线证明了汽车等重工业存在严格的最小公倍数最优规模，盲目分散设厂将导致严重的巨额成本劣势。</a:t>
             </a:r>
           </a:p>
         </p:txBody>
@@ -12975,7 +12975,7 @@
                 <a:latin typeface="Times New Roman"/>
                 <a:ea typeface="宋体"/>
               </a:rPr>
-              <a:t>  1. 柯布-道格拉斯生产函数四大性质</a:t>
+              <a:t>1. 柯布-道格拉斯生产函数四大性质</a:t>
             </a:r>
           </a:p>
         </p:txBody>
@@ -13018,7 +13018,7 @@
                 <a:latin typeface="Times New Roman"/>
                 <a:ea typeface="宋体"/>
               </a:rPr>
-              <a:t>（1）数学模型： </a:t>
+              <a:t>（1）数学模型：</a:t>
             </a:r>
             <a:r>
               <a:rPr sz="1150" b="0">
@@ -13028,7 +13028,7 @@
                 <a:latin typeface="Times New Roman"/>
                 <a:ea typeface="宋体"/>
               </a:rPr>
-              <a:t>Q = A K^\alpha L^\beta \quad (A: 技术常数, \alpha, \beta &gt; 0)</a:t>
+              <a:t>Q = A K^α L^β (A: 技术常数, α, β &gt; 0)</a:t>
             </a:r>
           </a:p>
           <a:p>
@@ -13048,7 +13048,7 @@
                 <a:latin typeface="Times New Roman"/>
                 <a:ea typeface="宋体"/>
               </a:rPr>
-              <a:t>（2）四大优良性质： </a:t>
+              <a:t>（2）四大优良性质：</a:t>
             </a:r>
             <a:r>
               <a:rPr sz="1150" b="0">
@@ -13078,7 +13078,7 @@
                 <a:latin typeface="Times New Roman"/>
                 <a:ea typeface="宋体"/>
               </a:rPr>
-              <a:t>   • 性质一（对数线性）： </a:t>
+              <a:t>• 性质一（对数线性）：</a:t>
             </a:r>
             <a:r>
               <a:rPr sz="1150" b="0">
@@ -13088,7 +13088,7 @@
                 <a:latin typeface="Times New Roman"/>
                 <a:ea typeface="宋体"/>
               </a:rPr>
-              <a:t>\ln Q = \ln A + \alpha \ln K + \beta \ln L，极易使用 OLS 线性回归估计。</a:t>
+              <a:t>ln Q = ln A + α ln K + β ln L，极易使用 OLS 线性回归估计。</a:t>
             </a:r>
           </a:p>
           <a:p>
@@ -13108,7 +13108,7 @@
                 <a:latin typeface="Times New Roman"/>
                 <a:ea typeface="宋体"/>
               </a:rPr>
-              <a:t>   • 性质二（要素互补）： </a:t>
+              <a:t>• 性质二（要素互补）：</a:t>
             </a:r>
             <a:r>
               <a:rPr sz="1150" b="0">
@@ -13118,7 +13118,7 @@
                 <a:latin typeface="Times New Roman"/>
                 <a:ea typeface="宋体"/>
               </a:rPr>
-              <a:t>MP_L = \beta Q/L, MP_K = \alpha Q/K，要素边际产出取决于彼此投入量。</a:t>
+              <a:t>MP_L = β Q/L, MP_K = α Q/K，要素边际产出取决于彼此投入量。</a:t>
             </a:r>
           </a:p>
           <a:p>
@@ -13138,7 +13138,7 @@
                 <a:latin typeface="Times New Roman"/>
                 <a:ea typeface="宋体"/>
               </a:rPr>
-              <a:t>   • 性质三（规模报酬判别）： </a:t>
+              <a:t>• 性质三（规模报酬判别）：</a:t>
             </a:r>
             <a:r>
               <a:rPr sz="1150" b="0">
@@ -13148,7 +13148,7 @@
                 <a:latin typeface="Times New Roman"/>
                 <a:ea typeface="宋体"/>
               </a:rPr>
-              <a:t>\alpha + \beta &gt; 1 (递增), \alpha + \beta = 1 (不变), \alpha + \beta &lt; 1 (递减)。</a:t>
+              <a:t>α + β &gt; 1 (递增), α + β = 1 (不变), α + β &lt; 1 (递减)。</a:t>
             </a:r>
           </a:p>
           <a:p>
@@ -13168,7 +13168,7 @@
                 <a:latin typeface="Times New Roman"/>
                 <a:ea typeface="宋体"/>
               </a:rPr>
-              <a:t>   • 性质四（产出弹性直接对应）： </a:t>
+              <a:t>• 性质四（产出弹性直接对应）：</a:t>
             </a:r>
             <a:r>
               <a:rPr sz="1150" b="0">
@@ -13178,7 +13178,7 @@
                 <a:latin typeface="Times New Roman"/>
                 <a:ea typeface="宋体"/>
               </a:rPr>
-              <a:t>\alpha 为资本产出弹性，\beta 为劳动产出弹性。</a:t>
+              <a:t>α 为资本产出弹性，β 为劳动产出弹性。</a:t>
             </a:r>
           </a:p>
         </p:txBody>
@@ -13278,7 +13278,7 @@
                 <a:latin typeface="Times New Roman"/>
                 <a:ea typeface="宋体"/>
               </a:rPr>
-              <a:t>  2. 技术进步的三大分类（等产量线内移）</a:t>
+              <a:t>2. 技术进步的三大分类（等产量线内移）</a:t>
             </a:r>
           </a:p>
         </p:txBody>
@@ -13321,7 +13321,7 @@
                 <a:latin typeface="Times New Roman"/>
                 <a:ea typeface="宋体"/>
               </a:rPr>
-              <a:t>（1）劳动节约型（Labor-saving）： </a:t>
+              <a:t>（1）劳动节约型（Labor-saving）：</a:t>
             </a:r>
             <a:r>
               <a:rPr sz="1250" b="0">
@@ -13351,7 +13351,7 @@
                 <a:latin typeface="Times New Roman"/>
                 <a:ea typeface="宋体"/>
               </a:rPr>
-              <a:t>（2）资本节约型（Capital-saving）： </a:t>
+              <a:t>（2）资本节约型（Capital-saving）：</a:t>
             </a:r>
             <a:r>
               <a:rPr sz="1250" b="0">
@@ -13381,7 +13381,7 @@
                 <a:latin typeface="Times New Roman"/>
                 <a:ea typeface="宋体"/>
               </a:rPr>
-              <a:t>（3）中立型（Neutral）： </a:t>
+              <a:t>（3）中立型（Neutral）：</a:t>
             </a:r>
             <a:r>
               <a:rPr sz="1250" b="0">
@@ -13448,7 +13448,7 @@
                 <a:latin typeface="Times New Roman"/>
                 <a:ea typeface="宋体"/>
               </a:rPr>
-              <a:t>  ★ 核心要点：柯布-道格拉斯生产函数是宏观与微观实证经济学中应用最广、数学性质最优雅的经典生产函数。</a:t>
+              <a:t>★ 核心要点：柯布-道格拉斯生产函数是宏观与微观实证经济学中应用最广、数学性质最优雅的经典生产函数。</a:t>
             </a:r>
           </a:p>
         </p:txBody>
@@ -13855,7 +13855,7 @@
                 <a:latin typeface="Times New Roman"/>
                 <a:ea typeface="宋体"/>
               </a:rPr>
-              <a:t>  1. 索洛余值（Solow Residual）增长核算方程</a:t>
+              <a:t>1. 索洛余值（Solow Residual）增长核算方程</a:t>
             </a:r>
           </a:p>
         </p:txBody>
@@ -13898,7 +13898,7 @@
                 <a:latin typeface="Times New Roman"/>
                 <a:ea typeface="宋体"/>
               </a:rPr>
-              <a:t>（1）生产函数全微分： </a:t>
+              <a:t>（1）生产函数全微分：</a:t>
             </a:r>
             <a:r>
               <a:rPr sz="1250" b="0">
@@ -13908,7 +13908,7 @@
                 <a:latin typeface="Times New Roman"/>
                 <a:ea typeface="宋体"/>
               </a:rPr>
-              <a:t>dQ = \frac{\partial Q}{\partial A} dA + \frac{\partial Q}{\partial K} dK + \frac{\partial Q}{\partial L} dL</a:t>
+              <a:t>dQ = (∂ Q) / (∂ A) dA + (∂ Q) / (∂ K) dK + (∂ Q) / (∂ L) dL</a:t>
             </a:r>
           </a:p>
           <a:p>
@@ -13928,7 +13928,7 @@
                 <a:latin typeface="Times New Roman"/>
                 <a:ea typeface="宋体"/>
               </a:rPr>
-              <a:t>（2）经典增长率分解方程： </a:t>
+              <a:t>（2）经典增长率分解方程：</a:t>
             </a:r>
             <a:r>
               <a:rPr sz="1250" b="0">
@@ -13938,7 +13938,7 @@
                 <a:latin typeface="Times New Roman"/>
                 <a:ea typeface="宋体"/>
               </a:rPr>
-              <a:t>G_Q = G_A + \alpha G_K + \beta G_L \implies G_A = G_Q - (\alpha G_K + \beta G_L)</a:t>
+              <a:t>G_Q = G_A + α G_K + β G_L ⇒ G_A = G_Q - (α G_K + β G_L)</a:t>
             </a:r>
           </a:p>
           <a:p>
@@ -13958,7 +13958,7 @@
                 <a:latin typeface="Times New Roman"/>
                 <a:ea typeface="宋体"/>
               </a:rPr>
-              <a:t>（3）各变量经济学含义： </a:t>
+              <a:t>（3）各变量经济学含义：</a:t>
             </a:r>
             <a:r>
               <a:rPr sz="1250" b="0">
@@ -13988,7 +13988,7 @@
                 <a:latin typeface="Times New Roman"/>
                 <a:ea typeface="宋体"/>
               </a:rPr>
-              <a:t>（4）技术进步贡献率测算： </a:t>
+              <a:t>（4）技术进步贡献率测算：</a:t>
             </a:r>
             <a:r>
               <a:rPr sz="1250" b="0">
@@ -13998,7 +13998,7 @@
                 <a:latin typeface="Times New Roman"/>
                 <a:ea typeface="宋体"/>
               </a:rPr>
-              <a:t>\text{技术进步对增长的贡献率} = \frac{G_A}{G_Q} \times 100\%</a:t>
+              <a:t>技术进步对增长的贡献率 = G_A / G_Q × 100%</a:t>
             </a:r>
           </a:p>
         </p:txBody>
@@ -14098,7 +14098,7 @@
                 <a:latin typeface="Times New Roman"/>
                 <a:ea typeface="宋体"/>
               </a:rPr>
-              <a:t>  2. 例4-7 实操演算与案例4-4摩尔定律</a:t>
+              <a:t>2. 例4-7 实操演算与案例4-4摩尔定律</a:t>
             </a:r>
           </a:p>
         </p:txBody>
@@ -14141,7 +14141,7 @@
                 <a:latin typeface="Times New Roman"/>
                 <a:ea typeface="宋体"/>
               </a:rPr>
-              <a:t>（1）例4-7 算例推导： </a:t>
+              <a:t>（1）例4-7 算例推导：</a:t>
             </a:r>
             <a:r>
               <a:rPr sz="1250" b="0">
@@ -14151,7 +14151,7 @@
                 <a:latin typeface="Times New Roman"/>
                 <a:ea typeface="宋体"/>
               </a:rPr>
-              <a:t>某国 GDP 增长 G_Q=6\%，资本增长 G_K=9\%，劳动增长 G_L=3\%，资本弹性 \alpha=0.2，劳动弹性 \beta=0.8。</a:t>
+              <a:t>某国 GDP 增长 G_Q=6%，资本增长 G_K=9%，劳动增长 G_L=3%，资本弹性 α=0.2，劳动弹性 β=0.8。</a:t>
             </a:r>
           </a:p>
           <a:p>
@@ -14171,7 +14171,7 @@
                 <a:latin typeface="Times New Roman"/>
                 <a:ea typeface="宋体"/>
               </a:rPr>
-              <a:t>（2）求解技术进步率： </a:t>
+              <a:t>（2）求解技术进步率：</a:t>
             </a:r>
             <a:r>
               <a:rPr sz="1250" b="0">
@@ -14181,7 +14181,7 @@
                 <a:latin typeface="Times New Roman"/>
                 <a:ea typeface="宋体"/>
               </a:rPr>
-              <a:t>G_A = 6\% - (0.2 \times 9\% + 0.8 \times 3\%) = 6\% - (1.8\% + 2.4\%) = 1.8\%。</a:t>
+              <a:t>G_A = 6% - (0.2 × 9% + 0.8 × 3%) = 6% - (1.8% + 2.4%) = 1.8%。</a:t>
             </a:r>
           </a:p>
           <a:p>
@@ -14201,7 +14201,7 @@
                 <a:latin typeface="Times New Roman"/>
                 <a:ea typeface="宋体"/>
               </a:rPr>
-              <a:t>（3）技术贡献率： </a:t>
+              <a:t>（3）技术贡献率：</a:t>
             </a:r>
             <a:r>
               <a:rPr sz="1250" b="0">
@@ -14211,7 +14211,7 @@
                 <a:latin typeface="Times New Roman"/>
                 <a:ea typeface="宋体"/>
               </a:rPr>
-              <a:t>技术进步贡献率 = 1.8\% / 6\% = 30\%。</a:t>
+              <a:t>技术进步贡献率 = 1.8% / 6% = 30%。</a:t>
             </a:r>
           </a:p>
           <a:p>
@@ -14231,7 +14231,7 @@
                 <a:latin typeface="Times New Roman"/>
                 <a:ea typeface="宋体"/>
               </a:rPr>
-              <a:t>（4）案例4-4 启示： </a:t>
+              <a:t>（4）案例4-4 启示：</a:t>
             </a:r>
             <a:r>
               <a:rPr sz="1250" b="0">
@@ -14298,7 +14298,7 @@
                 <a:latin typeface="Times New Roman"/>
                 <a:ea typeface="宋体"/>
               </a:rPr>
-              <a:t>  ★ 核心要点：现代经济增长早已从依靠汗水与资本堆积的粗放型增长，全面转向依靠全要素生产率 TFP 驱动的集约型增长。</a:t>
+              <a:t>★ 核心要点：现代经济增长早已从依靠汗水与资本堆积的粗放型增长，全面转向依靠全要素生产率 TFP 驱动的集约型增长。</a:t>
             </a:r>
           </a:p>
         </p:txBody>
@@ -14705,7 +14705,7 @@
                 <a:latin typeface="Times New Roman"/>
                 <a:ea typeface="宋体"/>
               </a:rPr>
-              <a:t>  短期单一要素最优化</a:t>
+              <a:t>短期单一要素最优化</a:t>
             </a:r>
           </a:p>
         </p:txBody>
@@ -14909,7 +14909,7 @@
                 <a:latin typeface="Times New Roman"/>
                 <a:ea typeface="宋体"/>
               </a:rPr>
-              <a:t>  长期多要素最低成本</a:t>
+              <a:t>长期多要素最低成本</a:t>
             </a:r>
           </a:p>
         </p:txBody>
@@ -15113,7 +15113,7 @@
                 <a:latin typeface="Times New Roman"/>
                 <a:ea typeface="宋体"/>
               </a:rPr>
-              <a:t>  规模收益与九大因素</a:t>
+              <a:t>规模收益与九大因素</a:t>
             </a:r>
           </a:p>
         </p:txBody>
@@ -15317,7 +15317,7 @@
                 <a:latin typeface="Times New Roman"/>
                 <a:ea typeface="宋体"/>
               </a:rPr>
-              <a:t>  柯布函数与技术进步</a:t>
+              <a:t>柯布函数与技术进步</a:t>
             </a:r>
           </a:p>
         </p:txBody>
@@ -15478,7 +15478,7 @@
                 <a:latin typeface="Times New Roman"/>
                 <a:ea typeface="宋体"/>
               </a:rPr>
-              <a:t>  ★ 战略结语：生产决策分析是企业打磨底层成本护城河的核心武器，统筹兼顾短期要素边际产值、长期最佳要素配比与规模经济边界。</a:t>
+              <a:t>★ 战略结语：生产决策分析是企业打磨底层成本护城河的核心武器，统筹兼顾短期要素边际产值、长期最佳要素配比与规模经济边界。</a:t>
             </a:r>
           </a:p>
         </p:txBody>
@@ -15885,7 +15885,7 @@
                 <a:latin typeface="Times New Roman"/>
                 <a:ea typeface="宋体"/>
               </a:rPr>
-              <a:t>  课后复习思考题与 MBA 讨论案例（严格对应课本习题）</a:t>
+              <a:t>课后复习思考题与 MBA 讨论案例（严格对应课本习题）</a:t>
             </a:r>
           </a:p>
         </p:txBody>
@@ -15928,7 +15928,7 @@
                 <a:latin typeface="Times New Roman"/>
                 <a:ea typeface="宋体"/>
               </a:rPr>
-              <a:t>1. </a:t>
+              <a:t>1.</a:t>
             </a:r>
             <a:r>
               <a:rPr sz="1150" b="0">
@@ -15958,7 +15958,7 @@
                 <a:latin typeface="Times New Roman"/>
                 <a:ea typeface="宋体"/>
               </a:rPr>
-              <a:t>2. </a:t>
+              <a:t>2.</a:t>
             </a:r>
             <a:r>
               <a:rPr sz="1150" b="0">
@@ -15988,7 +15988,7 @@
                 <a:latin typeface="Times New Roman"/>
                 <a:ea typeface="宋体"/>
               </a:rPr>
-              <a:t>3. </a:t>
+              <a:t>3.</a:t>
             </a:r>
             <a:r>
               <a:rPr sz="1150" b="0">
@@ -16018,7 +16018,7 @@
                 <a:latin typeface="Times New Roman"/>
                 <a:ea typeface="宋体"/>
               </a:rPr>
-              <a:t>4. </a:t>
+              <a:t>4.</a:t>
             </a:r>
             <a:r>
               <a:rPr sz="1150" b="0">
@@ -16048,7 +16048,7 @@
                 <a:latin typeface="Times New Roman"/>
                 <a:ea typeface="宋体"/>
               </a:rPr>
-              <a:t>5. </a:t>
+              <a:t>5.</a:t>
             </a:r>
             <a:r>
               <a:rPr sz="1150" b="0">
@@ -16078,7 +16078,7 @@
                 <a:latin typeface="Times New Roman"/>
                 <a:ea typeface="宋体"/>
               </a:rPr>
-              <a:t>6. </a:t>
+              <a:t>6.</a:t>
             </a:r>
             <a:r>
               <a:rPr sz="1150" b="0">
@@ -16088,7 +16088,7 @@
                 <a:latin typeface="Times New Roman"/>
                 <a:ea typeface="宋体"/>
               </a:rPr>
-              <a:t>【作业题2】某生产过程劳动边际产量 MP_L = 10(K^{0.5}/L^{0.5})，资本固定为 64 单位，工资 w=10 元，售价 P=5 元。求最优劳动力投入量。</a:t>
+              <a:t>【作业题2】某生产过程劳动边际产量 MP_L = 10(K^0.5/L^0.5)，资本固定为 64 单位，工资 w=10 元，售价 P=5 元。求最优劳动力投入量。</a:t>
             </a:r>
           </a:p>
           <a:p>
@@ -16108,7 +16108,7 @@
                 <a:latin typeface="Times New Roman"/>
                 <a:ea typeface="宋体"/>
               </a:rPr>
-              <a:t>7. </a:t>
+              <a:t>7.</a:t>
             </a:r>
             <a:r>
               <a:rPr sz="1150" b="0">
@@ -16118,7 +16118,7 @@
                 <a:latin typeface="Times New Roman"/>
                 <a:ea typeface="宋体"/>
               </a:rPr>
-              <a:t>【作业题8】某企业生产函数为 Q = 10 L^{0.5} K^{0.5}，工资 w=50 元，资本租金 r=200 元。若企业计划生产 1000 单位产品，求最低总成本及最优要素组合。</a:t>
+              <a:t>【作业题8】某企业生产函数为 Q = 10 L^0.5 K^0.5，工资 w=50 元，资本租金 r=200 元。若企业计划生产 1000 单位产品，求最低总成本及最优要素组合。</a:t>
             </a:r>
           </a:p>
         </p:txBody>
@@ -16832,7 +16832,7 @@
                 <a:latin typeface="Times New Roman"/>
                 <a:ea typeface="宋体"/>
               </a:rPr>
-              <a:t>  1. 生产函数的定义与数学表达</a:t>
+              <a:t>1. 生产函数的定义与数学表达</a:t>
             </a:r>
           </a:p>
         </p:txBody>
@@ -16875,7 +16875,7 @@
                 <a:latin typeface="Times New Roman"/>
                 <a:ea typeface="宋体"/>
               </a:rPr>
-              <a:t>（1）经济学定义： </a:t>
+              <a:t>（1）经济学定义：</a:t>
             </a:r>
             <a:r>
               <a:rPr sz="1250" b="0">
@@ -16905,7 +16905,7 @@
                 <a:latin typeface="Times New Roman"/>
                 <a:ea typeface="宋体"/>
               </a:rPr>
-              <a:t>（2）一般代数方程： </a:t>
+              <a:t>（2）一般代数方程：</a:t>
             </a:r>
             <a:r>
               <a:rPr sz="1250" b="0">
@@ -16915,7 +16915,7 @@
                 <a:latin typeface="Times New Roman"/>
                 <a:ea typeface="宋体"/>
               </a:rPr>
-              <a:t>Q = f(X_1, X_2, ..., X_n) \quad (Q: 最大产出量, X_i: 各种要素投入量)</a:t>
+              <a:t>Q = f(X₁, X₂, ..., Xₙ) (Q: 最大产出量, Xᵢ: 各种要素投入量)</a:t>
             </a:r>
           </a:p>
           <a:p>
@@ -16935,7 +16935,7 @@
                 <a:latin typeface="Times New Roman"/>
                 <a:ea typeface="宋体"/>
               </a:rPr>
-              <a:t>（3）两要素经典简化模型： </a:t>
+              <a:t>（3）两要素经典简化模型：</a:t>
             </a:r>
             <a:r>
               <a:rPr sz="1250" b="0">
@@ -16945,7 +16945,7 @@
                 <a:latin typeface="Times New Roman"/>
                 <a:ea typeface="宋体"/>
               </a:rPr>
-              <a:t>Q = f(L, K) \quad (L: 劳动力投入量, K: 资本与厂房设备投入量)</a:t>
+              <a:t>Q = f(L, K) (L: 劳动力投入量, K: 资本与厂房设备投入量)</a:t>
             </a:r>
           </a:p>
           <a:p>
@@ -16965,7 +16965,7 @@
                 <a:latin typeface="Times New Roman"/>
                 <a:ea typeface="宋体"/>
               </a:rPr>
-              <a:t>（4）技术效率假定： </a:t>
+              <a:t>（4）技术效率假定：</a:t>
             </a:r>
             <a:r>
               <a:rPr sz="1250" b="0">
@@ -17075,7 +17075,7 @@
                 <a:latin typeface="Times New Roman"/>
                 <a:ea typeface="宋体"/>
               </a:rPr>
-              <a:t>  2. 短期与长期的严格经济学划分</a:t>
+              <a:t>2. 短期与长期的严格经济学划分</a:t>
             </a:r>
           </a:p>
         </p:txBody>
@@ -17118,7 +17118,7 @@
                 <a:latin typeface="Times New Roman"/>
                 <a:ea typeface="宋体"/>
               </a:rPr>
-              <a:t>（1）短期生产函数（Short Run）： </a:t>
+              <a:t>（1）短期生产函数（Short Run）：</a:t>
             </a:r>
             <a:r>
               <a:rPr sz="1250" b="0">
@@ -17128,7 +17128,7 @@
                 <a:latin typeface="Times New Roman"/>
                 <a:ea typeface="宋体"/>
               </a:rPr>
-              <a:t>至少有一种投入要素的投入量是固定不变的（通常厂房设备 K 固定，劳动力 L 可变），即 Q = f(L, \bar{K})。</a:t>
+              <a:t>至少有一种投入要素的投入量是固定不变的（通常厂房设备 K 固定，劳动力 L 可变），即 Q = f(L, K̄)。</a:t>
             </a:r>
           </a:p>
           <a:p>
@@ -17148,7 +17148,7 @@
                 <a:latin typeface="Times New Roman"/>
                 <a:ea typeface="宋体"/>
               </a:rPr>
-              <a:t>（2）长期生产函数（Long Run）： </a:t>
+              <a:t>（2）长期生产函数（Long Run）：</a:t>
             </a:r>
             <a:r>
               <a:rPr sz="1250" b="0">
@@ -17178,7 +17178,7 @@
                 <a:latin typeface="Times New Roman"/>
                 <a:ea typeface="宋体"/>
               </a:rPr>
-              <a:t>（3）决策任务对应关系： </a:t>
+              <a:t>（3）决策任务对应关系：</a:t>
             </a:r>
             <a:r>
               <a:rPr sz="1250" b="0">
@@ -17245,7 +17245,7 @@
                 <a:latin typeface="Times New Roman"/>
                 <a:ea typeface="宋体"/>
               </a:rPr>
-              <a:t>  ★ 核心要点：短期与长期的区分不是按日历时间绝对长短划分，而是完全取决于要素调整的技术与合约灵活性。</a:t>
+              <a:t>★ 核心要点：短期与长期的区分不是按日历时间绝对长短划分，而是完全取决于要素调整的技术与合约灵活性。</a:t>
             </a:r>
           </a:p>
         </p:txBody>
@@ -17983,7 +17983,7 @@
                 <a:latin typeface="Times New Roman"/>
                 <a:ea typeface="宋体"/>
               </a:rPr>
-              <a:t>  三次函数推导与三大定理</a:t>
+              <a:t>三次函数推导与三大定理</a:t>
             </a:r>
           </a:p>
         </p:txBody>
@@ -18026,7 +18026,7 @@
                 <a:latin typeface="Times New Roman"/>
                 <a:ea typeface="宋体"/>
               </a:rPr>
-              <a:t>（1）数学建模方程： </a:t>
+              <a:t>（1）数学建模方程：</a:t>
             </a:r>
             <a:r>
               <a:rPr sz="1200" b="0">
@@ -18036,7 +18036,7 @@
                 <a:latin typeface="Times New Roman"/>
                 <a:ea typeface="宋体"/>
               </a:rPr>
-              <a:t>总产 TP = 3L^2 - \frac{1}{3}L^3 \implies 均产 AP = 3L - \frac{1}{3}L^2 \implies 边产 MP = 6L - L^2</a:t>
+              <a:t>总产 TP = 3L² - 1 / 3L³ ⇒ 均产 AP = 3L - 1 / 3L² ⇒ 边产 MP = 6L - L²</a:t>
             </a:r>
           </a:p>
           <a:p>
@@ -18056,7 +18056,7 @@
                 <a:latin typeface="Times New Roman"/>
                 <a:ea typeface="宋体"/>
               </a:rPr>
-              <a:t>（2）定理一（MP 是 TP 切线斜率）： </a:t>
+              <a:t>（2）定理一（MP 是 TP 切线斜率）：</a:t>
             </a:r>
             <a:r>
               <a:rPr sz="1200" b="0">
@@ -18086,7 +18086,7 @@
                 <a:latin typeface="Times New Roman"/>
                 <a:ea typeface="宋体"/>
               </a:rPr>
-              <a:t>（3）定理二（AP 是 TP 与原点连线斜率）： </a:t>
+              <a:t>（3）定理二（AP 是 TP 与原点连线斜率）：</a:t>
             </a:r>
             <a:r>
               <a:rPr sz="1200" b="0">
@@ -18116,7 +18116,7 @@
                 <a:latin typeface="Times New Roman"/>
                 <a:ea typeface="宋体"/>
               </a:rPr>
-              <a:t>（4）定理三（MP 与 AP 的牵引关系）： </a:t>
+              <a:t>（4）定理三（MP 与 AP 的牵引关系）：</a:t>
             </a:r>
             <a:r>
               <a:rPr sz="1200" b="0">
@@ -18183,7 +18183,7 @@
                 <a:latin typeface="Times New Roman"/>
                 <a:ea typeface="宋体"/>
               </a:rPr>
-              <a:t>  ★ 理论精要：三大定理是微观生产分析的数学金科玉律，准确指引企业劳动力边际产出的几何走向。</a:t>
+              <a:t>★ 理论精要：三大定理是微观生产分析的数学金科玉律，准确指引企业劳动力边际产出的几何走向。</a:t>
             </a:r>
           </a:p>
         </p:txBody>
@@ -18590,7 +18590,7 @@
                 <a:latin typeface="Times New Roman"/>
                 <a:ea typeface="宋体"/>
               </a:rPr>
-              <a:t>  1. 边际收益递减规律（Law of Diminishing Returns）</a:t>
+              <a:t>1. 边际收益递减规律（Law of Diminishing Returns）</a:t>
             </a:r>
           </a:p>
         </p:txBody>
@@ -18633,7 +18633,7 @@
                 <a:latin typeface="Times New Roman"/>
                 <a:ea typeface="宋体"/>
               </a:rPr>
-              <a:t>（1）规律严格表述： </a:t>
+              <a:t>（1）规律严格表述：</a:t>
             </a:r>
             <a:r>
               <a:rPr sz="1250" b="0">
@@ -18663,7 +18663,7 @@
                 <a:latin typeface="Times New Roman"/>
                 <a:ea typeface="宋体"/>
               </a:rPr>
-              <a:t>（2）客观物理根源： </a:t>
+              <a:t>（2）客观物理根源：</a:t>
             </a:r>
             <a:r>
               <a:rPr sz="1250" b="0">
@@ -18693,7 +18693,7 @@
                 <a:latin typeface="Times New Roman"/>
                 <a:ea typeface="宋体"/>
               </a:rPr>
-              <a:t>（3）生活中的经济学4-1： </a:t>
+              <a:t>（3）生活中的经济学4-1：</a:t>
             </a:r>
             <a:r>
               <a:rPr sz="1250" b="0">
@@ -18723,7 +18723,7 @@
                 <a:latin typeface="Times New Roman"/>
                 <a:ea typeface="宋体"/>
               </a:rPr>
-              <a:t>（4）案例4-1： </a:t>
+              <a:t>（4）案例4-1：</a:t>
             </a:r>
             <a:r>
               <a:rPr sz="1250" b="0">
@@ -18833,7 +18833,7 @@
                 <a:latin typeface="Times New Roman"/>
                 <a:ea typeface="宋体"/>
               </a:rPr>
-              <a:t>  2. 生产的三阶段划分及其经济合理性成本证明</a:t>
+              <a:t>2. 生产的三阶段划分及其经济合理性成本证明</a:t>
             </a:r>
           </a:p>
         </p:txBody>
@@ -18876,7 +18876,7 @@
                 <a:latin typeface="Times New Roman"/>
                 <a:ea typeface="宋体"/>
               </a:rPr>
-              <a:t>（1）第Ⅰ阶段（0 &lt; L &lt; L_{AP_{max}}）： </a:t>
+              <a:t>（1）第Ⅰ阶段（0 &lt; L &lt; L_AP_max）：</a:t>
             </a:r>
             <a:r>
               <a:rPr sz="1250" b="0">
@@ -18906,7 +18906,7 @@
                 <a:latin typeface="Times New Roman"/>
                 <a:ea typeface="宋体"/>
               </a:rPr>
-              <a:t>（2）第Ⅲ阶段（L &gt; L_{MP=0}）： </a:t>
+              <a:t>（2）第Ⅲ阶段（L &gt; L_MP=0）：</a:t>
             </a:r>
             <a:r>
               <a:rPr sz="1250" b="0">
@@ -18936,7 +18936,7 @@
                 <a:latin typeface="Times New Roman"/>
                 <a:ea typeface="宋体"/>
               </a:rPr>
-              <a:t>（3）第Ⅱ阶段（L_{AP_{max}} \le L \le L_{MP=0}）： </a:t>
+              <a:t>（3）第Ⅱ阶段（L_AP_max ≤ L ≤ L_MP=0）：</a:t>
             </a:r>
             <a:r>
               <a:rPr sz="1250" b="0">
@@ -19003,7 +19003,7 @@
                 <a:latin typeface="Times New Roman"/>
                 <a:ea typeface="宋体"/>
               </a:rPr>
-              <a:t>  ★ 核心要点：理性企业的短期最优用工规模必然且只能落在生产的第Ⅱ阶段之内。</a:t>
+              <a:t>★ 核心要点：理性企业的短期最优用工规模必然且只能落在生产的第Ⅱ阶段之内。</a:t>
             </a:r>
           </a:p>
         </p:txBody>
@@ -19410,7 +19410,7 @@
                 <a:latin typeface="Times New Roman"/>
                 <a:ea typeface="宋体"/>
               </a:rPr>
-              <a:t>  1. 边际产量收入（MRP）与利润最大化条件</a:t>
+              <a:t>1. 边际产量收入（MRP）与利润最大化条件</a:t>
             </a:r>
           </a:p>
         </p:txBody>
@@ -19453,7 +19453,7 @@
                 <a:latin typeface="Times New Roman"/>
                 <a:ea typeface="宋体"/>
               </a:rPr>
-              <a:t>（1）边际产量收入定义： </a:t>
+              <a:t>（1）边际产量收入定义：</a:t>
             </a:r>
             <a:r>
               <a:rPr sz="1250" b="0">
@@ -19463,7 +19463,7 @@
                 <a:latin typeface="Times New Roman"/>
                 <a:ea typeface="宋体"/>
               </a:rPr>
-              <a:t>MRP_L = MP_L \cdot MR = MP_L \cdot P \quad (完全竞争市场下 MR=P)</a:t>
+              <a:t>MRP_L = MP_L · MR = MP_L · P (完全竞争市场下 MR=P)</a:t>
             </a:r>
           </a:p>
           <a:p>
@@ -19483,7 +19483,7 @@
                 <a:latin typeface="Times New Roman"/>
                 <a:ea typeface="宋体"/>
               </a:rPr>
-              <a:t>（2）边际要素成本： </a:t>
+              <a:t>（2）边际要素成本：</a:t>
             </a:r>
             <a:r>
               <a:rPr sz="1250" b="0">
@@ -19493,7 +19493,7 @@
                 <a:latin typeface="Times New Roman"/>
                 <a:ea typeface="宋体"/>
               </a:rPr>
-              <a:t>MFC_L = w \quad (w 为市场工人工资率)</a:t>
+              <a:t>MFC_L = w (w 为市场工人工资率)</a:t>
             </a:r>
           </a:p>
           <a:p>
@@ -19513,7 +19513,7 @@
                 <a:latin typeface="Times New Roman"/>
                 <a:ea typeface="宋体"/>
               </a:rPr>
-              <a:t>（3）利润最大化决策准则： </a:t>
+              <a:t>（3）利润最大化决策准则：</a:t>
             </a:r>
             <a:r>
               <a:rPr sz="1250" b="0">
@@ -19523,7 +19523,7 @@
                 <a:latin typeface="Times New Roman"/>
                 <a:ea typeface="宋体"/>
               </a:rPr>
-              <a:t>增加用工直至 MRP_L = w \iff MP_L \cdot P = w</a:t>
+              <a:t>增加用工直至 MRP_L = w ⇔ MP_L · P = w</a:t>
             </a:r>
           </a:p>
           <a:p>
@@ -19543,7 +19543,7 @@
                 <a:latin typeface="Times New Roman"/>
                 <a:ea typeface="宋体"/>
               </a:rPr>
-              <a:t>（4）动态调整逻辑： </a:t>
+              <a:t>（4）动态调整逻辑：</a:t>
             </a:r>
             <a:r>
               <a:rPr sz="1250" b="0">
@@ -19653,7 +19653,7 @@
                 <a:latin typeface="Times New Roman"/>
                 <a:ea typeface="宋体"/>
               </a:rPr>
-              <a:t>  2. 例4-1 &amp; 例4-2 实操演算</a:t>
+              <a:t>2. 例4-1 &amp; 例4-2 实操演算</a:t>
             </a:r>
           </a:p>
         </p:txBody>
@@ -19696,7 +19696,7 @@
                 <a:latin typeface="Times New Roman"/>
                 <a:ea typeface="宋体"/>
               </a:rPr>
-              <a:t>（1）例4-1 算例： </a:t>
+              <a:t>（1）例4-1 算例：</a:t>
             </a:r>
             <a:r>
               <a:rPr sz="1250" b="0">
@@ -19726,7 +19726,7 @@
                 <a:latin typeface="Times New Roman"/>
                 <a:ea typeface="宋体"/>
               </a:rPr>
-              <a:t>（2）求解过程： </a:t>
+              <a:t>（2）求解过程：</a:t>
             </a:r>
             <a:r>
               <a:rPr sz="1250" b="0">
@@ -19756,7 +19756,7 @@
                 <a:latin typeface="Times New Roman"/>
                 <a:ea typeface="宋体"/>
               </a:rPr>
-              <a:t>（3）例4-2 算例： </a:t>
+              <a:t>（3）例4-2 算例：</a:t>
             </a:r>
             <a:r>
               <a:rPr sz="1250" b="0">
@@ -19766,7 +19766,7 @@
                 <a:latin typeface="Times New Roman"/>
                 <a:ea typeface="宋体"/>
               </a:rPr>
-              <a:t>边际产量 MP_L = 10(K^{0.5}/L^{0.5})，资本 K=64，产品价格 P=5元，工资 w=10元。</a:t>
+              <a:t>边际产量 MP_L = 10(K^0.5/L^0.5)，资本 K=64，产品价格 P=5元，工资 w=10元。</a:t>
             </a:r>
           </a:p>
           <a:p>
@@ -19786,7 +19786,7 @@
                 <a:latin typeface="Times New Roman"/>
                 <a:ea typeface="宋体"/>
               </a:rPr>
-              <a:t>（4）求解方程： </a:t>
+              <a:t>（4）求解方程：</a:t>
             </a:r>
             <a:r>
               <a:rPr sz="1250" b="0">
@@ -19796,7 +19796,7 @@
                 <a:latin typeface="Times New Roman"/>
                 <a:ea typeface="宋体"/>
               </a:rPr>
-              <a:t>MRP_L = 5 \times 10(8/L^{0.5}) = 400 / L^{0.5} = 10 \implies L^{0.5} = 40 \implies L^* = 1600 人。</a:t>
+              <a:t>MRP_L = 5 × 10(8/L^0.5) = 400 / L^0.5 = 10 ⇒ L^0.5 = 40 ⇒ L* = 1600 人。</a:t>
             </a:r>
           </a:p>
         </p:txBody>
@@ -19853,7 +19853,7 @@
                 <a:latin typeface="Times New Roman"/>
                 <a:ea typeface="宋体"/>
               </a:rPr>
-              <a:t>  ★ 核心要点：单一可变要素投入决策的本质是权衡劳动力边际产值与边际要素成本的对等性。</a:t>
+              <a:t>★ 核心要点：单一可变要素投入决策的本质是权衡劳动力边际产值与边际要素成本的对等性。</a:t>
             </a:r>
           </a:p>
         </p:txBody>
